--- a/OSu/Chap15.pptx
+++ b/OSu/Chap15.pptx
@@ -16168,7 +16168,7 @@
           <a:p>
             <a:r>
               <a:rPr lang="en-US" altLang="en-US" sz="2400" dirty="0"/>
-              <a:t>VFS allows the same system call interface (the API) to be used for different types of file systems</a:t>
+              <a:t>VFS allows the same system call interface (API) to be used for different types of file systems</a:t>
             </a:r>
           </a:p>
           <a:p>
